--- a/resource/2026年第二十七周周报-王凡.pptx
+++ b/resource/2026年第二十七周周报-王凡.pptx
@@ -10939,7 +10939,7 @@
         </p:nvGraphicFramePr>
         <p:xfrm>
           <a:off x="954405" y="941070"/>
-          <a:ext cx="11572875" cy="4759325"/>
+          <a:ext cx="9905365" cy="3061335"/>
         </p:xfrm>
         <a:graphic>
           <a:graphicData uri="http://schemas.openxmlformats.org/drawingml/2006/table">
@@ -10948,11 +10948,11 @@
                 <a:tableStyleId>{5C22544A-7EE6-4342-B048-85BDC9FD1C3A}</a:tableStyleId>
               </a:tblPr>
               <a:tblGrid>
-                <a:gridCol w="479425"/>
-                <a:gridCol w="1166495"/>
-                <a:gridCol w="6120130"/>
+                <a:gridCol w="469900"/>
+                <a:gridCol w="1321435"/>
+                <a:gridCol w="5974715"/>
                 <a:gridCol w="854710"/>
-                <a:gridCol w="1039495"/>
+                <a:gridCol w="1284605"/>
               </a:tblGrid>
               <a:tr h="325755">
                 <a:tc>
@@ -11134,7 +11134,7 @@
                   <a:tcPr anchor="ctr" anchorCtr="0"/>
                 </a:tc>
               </a:tr>
-              <a:tr h="1331595">
+              <a:tr h="556260">
                 <a:tc>
                   <a:txBody>
                     <a:bodyPr/>
@@ -12361,7 +12361,7 @@
                   <a:tcPr/>
                 </a:tc>
               </a:tr>
-              <a:tr h="955675">
+              <a:tr h="596265">
                 <a:tc>
                   <a:txBody>
                     <a:bodyPr/>
